--- a/prezentacija.pptx
+++ b/prezentacija.pptx
@@ -453,7 +453,7 @@
           <a:lstStyle xmlns:a="http://schemas.openxmlformats.org/drawingml/2006/main"/>
           <a:p xmlns:a="http://schemas.openxmlformats.org/drawingml/2006/main">
             <a:r>
-              <a:t>Dobar dan. Ja sam Mihailo Radojević i predstaviću master rad pod nazivom „Optimalna raspodela poslova na računarima“. Rad je urađen pod mentorstvom profesora Dragana Olćana i docentkinje Jovane Petrović. Osnovno pitanje rada je kako rasporediti veliki broj poslova na heterogene računare tako da ukupna zarada bude što veća, uz poštovanje svih vremenskih i tržišnih ograničenja.</a:t>
+              <a:t>Dobar dan. Ja sam Mihailo Radojević i predstaviću master rad „Optimalna raspodela poslova na računarima“, urađen pod mentorstvom profesora Dragana Olćana i docentkinje Jovane Petrović. Pitanje koje rad postavlja je jednostavno: kako veliki broj poslova rasporediti na skup računara različitih performansi tako da ukupna zarada bude što veća, a da pritom nijedno vremensko ni tržišno ograničenje ne bude prekršeno.</a:t>
             </a:r>
           </a:p>
         </p:txBody>
@@ -523,7 +523,7 @@
           <a:lstStyle xmlns:a="http://schemas.openxmlformats.org/drawingml/2006/main"/>
           <a:p xmlns:a="http://schemas.openxmlformats.org/drawingml/2006/main">
             <a:r>
-              <a:t>Eksperimentalni zaključak rada odnosi se na ispitane statičke linearne instance: HiGHS je dao najbolju vrednost funkcije cilja uz najmanje vreme. Nelinearnosti, dinamičke promene, više ciljeva i ograničenja koja se teško izražavaju linearnom formulacijom nisu ispitivani u radu; navedeni su kao moguća proširenja matematičkog modela i pravci buduće primene GA. Na grafikonu se vidi da je šest pokretanja velike instance dalo veoma slične putanje, ali jedno takvo pokretanje traje oko 3,4 sata. Ograničenje evaluacije je i to što je korišćen po jedan problem svake veličine.</a:t>
+              <a:t>Eksperimentalni zaključak važi za ispitane statičke linearne instance: HiGHS je dao najbolju vrednost funkcije cilja, i to za najkraće vreme. Nelinearnosti, dinamičke promene, više ciljeva i ograničenja koja se teško zapisuju linearno nisu ispitivani; navedeni su kao moguća proširenja modela i pravci primene genetičkog algoritma. Na grafikonu se vidi da je šest pokretanja velike instance dalo veoma slične putanje — ali jedno takvo pokretanje traje oko 3,4 sata. Ograničenje evaluacije je i to što je korišćen po jedan problem svake veličine.</a:t>
             </a:r>
           </a:p>
         </p:txBody>
@@ -593,7 +593,7 @@
           <a:lstStyle xmlns:a="http://schemas.openxmlformats.org/drawingml/2006/main"/>
           <a:p xmlns:a="http://schemas.openxmlformats.org/drawingml/2006/main">
             <a:r>
-              <a:t>Rezultati daju tri odgovora. Prvo, GA pronalazi stabilna rešenja kvaliteta od približno 97 do 99 procenata referentnog optimuma. Drugo, GA je bolji od slučajne pretrage na sve tri ispitane instance, ali veličina razlike zavisi od instance i posebno je izražena na problemu 100 puta 100. Treće, povećanje populacije povećava vrednost funkcije cilja, ali uz sve manji dodatni dobitak i brzo rastuće vreme izvršavanja.</a:t>
+              <a:t>Rezultati daju tri odgovora. Prvo, genetički algoritam nalazi stabilna rešenja kvaliteta od približno 97 do 99 procenata referentnog optimuma. Drugo, bolji je od slučajne pretrage na sve tri instance, a razlika je najizraženija na problemu sto puta sto. Treće, veći računski budžet daje bolju vrednost funkcije cilja, ali uz sve manji dobitak: četiri puta više evaluacija donosi 0,15 procenata boljе rešenje, a traje tri i po puta duže.</a:t>
             </a:r>
           </a:p>
         </p:txBody>
@@ -663,7 +663,7 @@
           <a:lstStyle xmlns:a="http://schemas.openxmlformats.org/drawingml/2006/main"/>
           <a:p xmlns:a="http://schemas.openxmlformats.org/drawingml/2006/main">
             <a:r>
-              <a:t>Jedan od glavnih doprinosa rada je specijalizovana procedura popravke: posle svake izmene hromozoma vraća rešenje u dopustivo stanje i zatim ga lokalno poboljšava profitabilnijim dodelama. HiGHS ostaje prvi izbor za ispitane linearne instance. Primena GA na proširene, dinamičke i višekriterijumske formulacije nije ispitana u ovom radu i predstavlja pravac daljeg istraživanja, zajedno sa adaptivnim operatorima i lokalnom pretragom. Hvala na pažnji.</a:t>
+              <a:t>Glavni doprinos rada je specijalizovana procedura popravke: posle svake izmene hromozoma ona vraća rešenje u dopustivo stanje i zatim ga poboljšava profitabilnijim dodelama. Za ispitane linearne instance HiGHS ostaje prvi izbor. Primena genetičkog algoritma na proširene, dinamičke i višekriterijumske formulacije nije ispitana u ovom radu i predstavlja pravac daljeg istraživanja, zajedno sa adaptivnim operatorima i lokalnom pretragom. Hvala na pažnji.</a:t>
             </a:r>
           </a:p>
         </p:txBody>
@@ -733,7 +733,7 @@
           <a:lstStyle xmlns:a="http://schemas.openxmlformats.org/drawingml/2006/main"/>
           <a:p xmlns:a="http://schemas.openxmlformats.org/drawingml/2006/main">
             <a:r>
-              <a:t>Posmatramo više servisa i heterogene računare. Oznaka p-i-j predstavlja zaradu po jedinici servisa i na računaru j, t-i-j vreme izvršavanja te jedinice na računaru j, a d-i ukupan zahtev za servis i. Promenljiva x-i-j označava broj jedinica servisa i raspoređenih na računar j. Maksimizujemo ukupnu zaradu uz dva glavna ograničenja: nijedan računar ne sme prekoračiti raspoloživo vreme, a za svaki servis ne sme se realizovati više jedinica nego što je zahtevano. Promenljive su nenegativne i celobrojne, pa formulacija ima m puta n promenljivih.</a:t>
+              <a:t>Na raspolaganju imamo više servisa i više računara, koji se razlikuju po brzini izvršavanja. Veličina p-i-j je zarada po jedinici servisa i na računaru j, t-i-j je vreme izvršavanja te jedinice, a d-i je broj jedinica servisa i koje treba realizovati. Promenljiva x-i-j kaže koliko je jedinica servisa i dodeljeno računaru j. Maksimizujemo ukupnu zaradu uz dva ograničenja: nijedan računar ne sme da prekorači svoje raspoloživo vreme, i ni za jedan servis ne sme se realizovati više jedinica nego što je traženo. Promenljive su celobrojne i nenegativne, pa problem ima m puta n promenljivih.</a:t>
             </a:r>
           </a:p>
         </p:txBody>
@@ -803,7 +803,7 @@
           <a:lstStyle xmlns:a="http://schemas.openxmlformats.org/drawingml/2006/main"/>
           <a:p xmlns:a="http://schemas.openxmlformats.org/drawingml/2006/main">
             <a:r>
-              <a:t>Rad povezuje matematički model i evolutivnu pretragu. Specijalizacija genetičkog algoritma odnosi se na predstavljanje rešenja i postupak popravke prilagođen ovom problemu. Hromozom je matrica raspodele poslova, a posle inicijalizacije, ukrštanja i mutacije primenjuje se namenska četvorofazna popravka. Selekcija, elitizam, ukrštanje i mutacija jesu standardni elementi GA, dok su matrični zapis hromozoma i popravka vezani za razmatranu raspodelu poslova.</a:t>
+              <a:t>Rad povezuje ovaj matematički model sa evolutivnom pretragom. Ono što je ovde specifično nije sam genetički algoritam, nego način na koji je rešenje predstavljeno i postupak popravke prilagođen ovom problemu. Hromozom je matrica raspodele poslova, a posle inicijalizacije, ukrštanja i mutacije primenjuje se namenska četvorofazna popravka. Selekcija, elitizam, ukrštanje i mutacija su standardni elementi; matrični zapis hromozoma i popravka su vezani za razmatranu raspodelu poslova.</a:t>
             </a:r>
           </a:p>
         </p:txBody>
@@ -873,7 +873,7 @@
           <a:lstStyle xmlns:a="http://schemas.openxmlformats.org/drawingml/2006/main"/>
           <a:p xmlns:a="http://schemas.openxmlformats.org/drawingml/2006/main">
             <a:r>
-              <a:t>Procedura popravke je centralni element algoritma i ima četiri determinističke faze. Najpre uklanja negativne vrednosti. Zatim smanjuje količine kada je premašen zahtev servisa. U trećoj fazi oslobađa prekoračeno vreme računara uklanjanjem najmanje profitabilnih jedinica, a na kraju preostali kapacitet pohlepno popunjava najprofitabilnijim dopustivim poslovima. GA i dalje ostaje populacioni algoritam globalne pretrage; popravka samo održava dopustivost i lokalno doteruje pojedinačna rešenja koja evolutivna pretraga proizvodi.</a:t>
+              <a:t>Popravka je centralni element algoritma i ima četiri determinističke faze. Prva uklanja negativne vrednosti. Druga smanjuje količine tamo gde je premašen zahtev servisa. Treća oslobađa prekoračeno vreme računara tako što uklanja najmanje profitabilne jedinice. Četvrta preostali kapacitet pohlepno popunjava najprofitabilnijim dopustivim poslovima. Genetički algoritam pritom ostaje populaciona globalna pretraga — popravka samo vraća rešenje u dopustivo stanje i lokalno ga dotera.</a:t>
             </a:r>
           </a:p>
         </p:txBody>
@@ -943,7 +943,7 @@
           <a:lstStyle xmlns:a="http://schemas.openxmlformats.org/drawingml/2006/main"/>
           <a:p xmlns:a="http://schemas.openxmlformats.org/drawingml/2006/main">
             <a:r>
-              <a:t>Ista matematička formulacija ispitana je na tri problema: 10 puta 10, 100 puta 100 i 1000 puta 1000, odnosno sa sto, deset hiljada i milion promenljivih. HiGHS je korišćen kao referentni alat za sve tri lokalno rešene instance, a slučajna pretraga kao kontrolna metoda. Za dodatnu online proveru korišćen je NEOS server sa Gurobi solverom. Online solver rešio je probleme 10 puta 10 i 100 puta 100, ali problem sa milion promenljivih nije mogao da reši tim putem. Konfiguracije su pokretane više puta, a sva vremenska merenja izvršena su na istom računaru, MacBook Pro uređaju sa M1 Pro procesorom i 16 gigabajta memorije.</a:t>
+              <a:t>Ista formulacija ispitana je na tri problema: deset puta deset, sto puta sto i hiljadu puta hiljadu, odnosno sa sto, deset hiljada i milion promenljivih. HiGHS je korišćen kao referentni alat, a slučajna pretraga kao kontrolna metoda. Za dodatnu proveru korišćen je i NEOS server sa Gurobi solverom; on je rešio prve dve instance, ali problem sa milion promenljivih tim putem nije mogao da se reši. Svaka konfiguracija je pokretana više puta, a sva merenja vremena urađena su na istom računaru — MacBook Pro sa M1 Pro procesorom i šesnaest gigabajta memorije.</a:t>
             </a:r>
           </a:p>
         </p:txBody>
@@ -1013,7 +1013,7 @@
           <a:lstStyle xmlns:a="http://schemas.openxmlformats.org/drawingml/2006/main"/>
           <a:p xmlns:a="http://schemas.openxmlformats.org/drawingml/2006/main">
             <a:r>
-              <a:t>Na grafikonu su prikazane reprezentativne konfiguracije genetičkog algoritma. Na maloj instanci konfiguracija sa istim budžetom kao slučajna pretraga dostiže 98,7 procenata optimuma; uz veći budžet GA prelazi 99 procenata, ali taj rezultat nije korišćen u ovom direktnom poređenju. Na srednjoj instanci GA dostiže 98,8 procenata, a na velikoj 97,1 procenat. To su kvalitetna i stabilna rešenja, ali je ključan nalaz da je HiGHS na sve tri ispitane linearne instance bio i bolji i brži. Malu instancu rešava za manje od sekunde, srednju za oko 7,7 sekundi, a na velikoj instanci sa milion promenljivih dokazuje optimum za oko 185 sekundi. GA na velikoj instanci zahteva više sati. Dakle, na ovom modelu genetički algoritam nije zamena za egzaktni alat.</a:t>
+              <a:t>Grafikon prikazuje najbolje konfiguracije genetičkog algoritma na svakoj instanci; sve navedene vrednosti su proseci pokretanja, ne najbolja pojedinačna pokretanja. Na maloj instanci, sa milion evaluacija, algoritam dostiže 98,7 procenata optimuma; još veća konfiguracija diže prosek na 98,9, a najbolje pokretanje prelazi 99 procenata. Na srednjoj instanci prosek je 98,8, a na velikoj 97,1 procenat. To su kvalitetna i stabilna rešenja. Ključni nalaz je ipak drugi: na sve tri ispitane linearne instance HiGHS je bio i bolji i brži. Malu instancu rešava za manje od sekunde, srednju za oko 7,7 sekundi, a na velikoj instanci sa milion promenljivih dokazuje optimum za oko 185 sekundi. Genetičkom algoritmu je na toj instanci potrebno preko četiri sata. Dakle, na ovom modelu on nije zamena za egzaktni alat.</a:t>
             </a:r>
           </a:p>
         </p:txBody>
@@ -1083,7 +1083,7 @@
           <a:lstStyle xmlns:a="http://schemas.openxmlformats.org/drawingml/2006/main"/>
           <a:p xmlns:a="http://schemas.openxmlformats.org/drawingml/2006/main">
             <a:r>
-              <a:t>Ovde su prikazane GA konfiguracije odabrane za poređenje sa kontrolnom metodom, pa se pojedine vrednosti blago razlikuju od prethodnog slajda. GA je bolji od slučajne pretrage na sve tri ispitane instance, ali veličina razlike zavisi od instance. Posebno odstupa instanca 100 puta 100. Velika razlika na njoj nije posledica broja evaluacija, jer su obe metode imale isti budžet od deset miliona evaluacija. Obe koriste isto generisanje početnih rešenja i istu popravku, pa razlika pokazuje doprinos selekcije, ukrštanja, mutacije i elitizma, koji pretragu usmeravaju ka kvalitetnijim raspodelama.</a:t>
+              <a:t>Ovde su obe metode poređene pri istom broju evaluacija na svakoj instanci — sto hiljada na maloj, deset miliona na srednjoj i dva miliona na velikoj — i prikazani su proseci pokretanja. Genetički algoritam je bolji od slučajne pretrage na sve tri instance, ali koliko je bolji zavisi od instance: 98,3 prema 82,9 procenata na maloj, 98,5 prema 49,6 na srednjoj i 97,1 prema 88,0 na velikoj. Najveća razlika je na problemu sto puta sto. Ta razlika ne dolazi od broja evaluacija, jer je budžet isti, a obe metode koriste i isto generisanje početnih rešenja i istu popravku. Ono što ostaje kao objašnjenje jeste doprinos selekcije, ukrštanja, mutacije i elitizma, koji pretragu usmeravaju ka kvalitetnijim raspodelama.</a:t>
             </a:r>
           </a:p>
         </p:txBody>
@@ -1153,7 +1153,7 @@
           <a:lstStyle xmlns:a="http://schemas.openxmlformats.org/drawingml/2006/main"/>
           <a:p xmlns:a="http://schemas.openxmlformats.org/drawingml/2006/main">
             <a:r>
-              <a:t>Pri istom ukupnom broju od milion evaluacija populacija od 1000 jedinki brže napreduje na početku jer prolazi kroz više generacija. Populacija od 2000 jedinki napreduje sporije, ali zahvaljujući većoj raznovrsnosti na kraju dostiže nešto bolju prosečnu vrednost: 88.817 prema 88.657 dinara. Dakle, veličina populacije utiče na konvergenciju: menja odnos između broja jedinki u generaciji, broja generacija i raznovrsnosti pretrage.</a:t>
+              <a:t>Uz isti ukupan broj od milion evaluacija, populacija od hiljadu jedinki brže napreduje na početku, jer prolazi kroz više generacija. Populacija od dve hiljade napreduje sporije, ali zahvaljujući većoj raznovrsnosti na kraju stiže do nešto bolje prosečne vrednosti — 88.817 prema 88.657 dinara. Veličina populacije, dakle, menja odnos između broja jedinki, broja generacija i raznovrsnosti pretrage.</a:t>
             </a:r>
           </a:p>
         </p:txBody>
@@ -1223,7 +1223,7 @@
           <a:lstStyle xmlns:a="http://schemas.openxmlformats.org/drawingml/2006/main"/>
           <a:p xmlns:a="http://schemas.openxmlformats.org/drawingml/2006/main">
             <a:r>
-              <a:t>Na problemu 100 puta 100 povećanje populacije povećava prosečnu vrednost funkcije cilja, ali se veličina dodatnog poboljšanja smanjuje. Prelazak sa 100 hiljada na 200 hiljada jedinki povećava prosečnu vrednost funkcije cilja za približno 0,15%, dok se prosečno vreme izvršavanja povećava oko tri i po puta. Zato najveća populacija nije automatski najbolji inženjerski izbor; treba birati tačku posle koje dodatni kvalitet više ne opravdava dodatno vreme.</a:t>
+              <a:t>Na instanci sto puta sto konfiguracije su poređane po ukupnom broju evaluacija, od pola miliona do četrdeset miliona; ispod svake oznake stoje veličina populacije i broj generacija čiji je proizvod taj budžet. Levo je prosečan kvalitet, desno prosečno vreme jednog pokretanja. Vreme raste gotovo linearno sa brojem evaluacija, a kvalitet se brzo zasićuje: već pri deset miliona evaluacija imamo 98,5 procenata optimuma. Poslednji korak to pokazuje najjasnije — četiri puta više posla podiže kvalitet za svega 0,15 procenata, a vreme sa petsto na hiljadu sedamsto osamdeset sekundi. Dve konfiguracije sa istih deset miliona evaluacija izdvajaju efekat populacije: sto hiljada jedinki daje bolji rezultat od pedeset hiljada, ali je skuplje po evaluaciji. Zato najveća konfiguracija nije automatski i najbolji inženjerski izbor.</a:t>
             </a:r>
           </a:p>
         </p:txBody>
@@ -2098,13 +2098,13 @@
               <c:formatCode>0.0"%"</c:formatCode>
               <c:ptCount val="3"/>
               <c:pt idx="0">
-                <c:v>98.7</c:v>
+                <c:v>98.28</c:v>
               </c:pt>
               <c:pt idx="1">
-                <c:v>98.59</c:v>
+                <c:v>98.52</c:v>
               </c:pt>
               <c:pt idx="2">
-                <c:v>97</c:v>
+                <c:v>97.1</c:v>
               </c:pt>
             </c:numLit>
           </c:val>
@@ -2139,13 +2139,13 @@
               <c:formatCode>0.0"%"</c:formatCode>
               <c:ptCount val="3"/>
               <c:pt idx="0">
-                <c:v>83.8</c:v>
+                <c:v>82.92</c:v>
               </c:pt>
               <c:pt idx="1">
                 <c:v>49.59</c:v>
               </c:pt>
               <c:pt idx="2">
-                <c:v>88</c:v>
+                <c:v>87.97</c:v>
               </c:pt>
             </c:numLit>
           </c:val>
@@ -2324,22 +2324,34 @@
             <c:strLit>
               <c:ptCount val="6"/>
               <c:pt idx="0">
-                <c:v>5k</c:v>
+                <c:v>0,5 M
+P=5k
+G=100</c:v>
               </c:pt>
               <c:pt idx="1">
-                <c:v>10k</c:v>
+                <c:v>1 M
+P=10k
+G=100</c:v>
               </c:pt>
               <c:pt idx="2">
-                <c:v>50k</c:v>
+                <c:v>10 M
+P=50k
+G=200</c:v>
               </c:pt>
               <c:pt idx="3">
-                <c:v>100k</c:v>
+                <c:v>10 M
+P=100k
+G=100</c:v>
               </c:pt>
               <c:pt idx="4">
-                <c:v>150k</c:v>
+                <c:v>30 M
+P=150k
+G=200</c:v>
               </c:pt>
               <c:pt idx="5">
-                <c:v>200k</c:v>
+                <c:v>40 M
+P=200k
+G=200</c:v>
               </c:pt>
             </c:strLit>
           </c:cat>
@@ -2348,22 +2360,22 @@
               <c:formatCode>0.00"%"</c:formatCode>
               <c:ptCount val="6"/>
               <c:pt idx="0">
-                <c:v>98.0879</c:v>
+                <c:v>97.9483</c:v>
               </c:pt>
               <c:pt idx="1">
-                <c:v>98.3121</c:v>
+                <c:v>98.1398</c:v>
               </c:pt>
               <c:pt idx="2">
-                <c:v>98.5912</c:v>
+                <c:v>98.5241</c:v>
               </c:pt>
               <c:pt idx="3">
-                <c:v>98.7198</c:v>
+                <c:v>98.6804</c:v>
               </c:pt>
               <c:pt idx="4">
-                <c:v>98.7509</c:v>
+                <c:v>98.7401</c:v>
               </c:pt>
               <c:pt idx="5">
-                <c:v>98.8394</c:v>
+                <c:v>98.8290</c:v>
               </c:pt>
             </c:numLit>
           </c:val>
@@ -2525,22 +2537,34 @@
             <c:strLit>
               <c:ptCount val="6"/>
               <c:pt idx="0">
-                <c:v>5k</c:v>
+                <c:v>0,5 M
+P=5k
+G=100</c:v>
               </c:pt>
               <c:pt idx="1">
-                <c:v>10k</c:v>
+                <c:v>1 M
+P=10k
+G=100</c:v>
               </c:pt>
               <c:pt idx="2">
-                <c:v>50k</c:v>
+                <c:v>10 M
+P=50k
+G=200</c:v>
               </c:pt>
               <c:pt idx="3">
-                <c:v>100k</c:v>
+                <c:v>10 M
+P=100k
+G=100</c:v>
               </c:pt>
               <c:pt idx="4">
-                <c:v>150k</c:v>
+                <c:v>30 M
+P=150k
+G=200</c:v>
               </c:pt>
               <c:pt idx="5">
-                <c:v>200k</c:v>
+                <c:v>40 M
+P=200k
+G=200</c:v>
               </c:pt>
             </c:strLit>
           </c:cat>
@@ -2753,6 +2777,10 @@
             <a:prstDash val="solid"/>
           </a:ln>
         </p:spPr>
+        <p:txBody xmlns:a="http://schemas.openxmlformats.org/drawingml/2006/main">
+          <a:bodyPr/>
+          <a:p/>
+        </p:txBody>
       </p:sp>
       <p:pic>
         <p:nvPicPr>
@@ -3090,7 +3118,7 @@
                 <a:ea typeface="Arial"/>
                 <a:cs typeface="Arial"/>
               </a:rPr>
-              <a:t>Univerzitet u Beogradu · Elektrotehnički fakultet · jul 2026.</a:t>
+              <a:t>Univerzitet u Beogradu · Elektrotehnički fakultet · avgust 2026.</a:t>
             </a:r>
           </a:p>
         </p:txBody>
@@ -3768,6 +3796,10 @@
             <a:prstDash val="solid"/>
           </a:ln>
         </p:spPr>
+        <p:txBody xmlns:a="http://schemas.openxmlformats.org/drawingml/2006/main">
+          <a:bodyPr/>
+          <a:p/>
+        </p:txBody>
       </p:sp>
       <p:sp>
         <p:nvSpPr>
@@ -3860,6 +3892,10 @@
             <a:prstDash val="solid"/>
           </a:ln>
         </p:spPr>
+        <p:txBody xmlns:a="http://schemas.openxmlformats.org/drawingml/2006/main">
+          <a:bodyPr/>
+          <a:p/>
+        </p:txBody>
       </p:sp>
       <p:pic>
         <p:nvPicPr>
@@ -4320,6 +4356,10 @@
             <a:prstDash val="solid"/>
           </a:ln>
         </p:spPr>
+        <p:txBody xmlns:a="http://schemas.openxmlformats.org/drawingml/2006/main">
+          <a:bodyPr/>
+          <a:p/>
+        </p:txBody>
       </p:sp>
       <p:sp>
         <p:nvSpPr>
@@ -4495,6 +4535,10 @@
             <a:prstDash val="solid"/>
           </a:ln>
         </p:spPr>
+        <p:txBody xmlns:a="http://schemas.openxmlformats.org/drawingml/2006/main">
+          <a:bodyPr/>
+          <a:p/>
+        </p:txBody>
       </p:sp>
       <p:sp>
         <p:nvSpPr>
@@ -4670,6 +4714,10 @@
             <a:prstDash val="solid"/>
           </a:ln>
         </p:spPr>
+        <p:txBody xmlns:a="http://schemas.openxmlformats.org/drawingml/2006/main">
+          <a:bodyPr/>
+          <a:p/>
+        </p:txBody>
       </p:sp>
       <p:sp>
         <p:nvSpPr>
@@ -4808,7 +4856,7 @@
                 <a:ea typeface="Arial"/>
                 <a:cs typeface="Arial"/>
               </a:rPr>
-              <a:t>Oko 3,5× duže za približno 0,15% veću vrednost funkcije cilja pri 200k jedinki.</a:t>
+              <a:t>Četiri puta veći broj evaluacija daje 0,15% bolju vrednost funkcije cilja uz 3,5× duže izvršavanje.</a:t>
             </a:r>
           </a:p>
         </p:txBody>
@@ -4845,6 +4893,10 @@
             <a:prstDash val="solid"/>
           </a:ln>
         </p:spPr>
+        <p:txBody xmlns:a="http://schemas.openxmlformats.org/drawingml/2006/main">
+          <a:bodyPr/>
+          <a:p/>
+        </p:txBody>
       </p:sp>
       <p:sp>
         <p:nvSpPr>
@@ -4966,6 +5018,10 @@
             <a:prstDash val="solid"/>
           </a:ln>
         </p:spPr>
+        <p:txBody xmlns:a="http://schemas.openxmlformats.org/drawingml/2006/main">
+          <a:bodyPr/>
+          <a:p/>
+        </p:txBody>
       </p:sp>
       <p:sp>
         <p:nvSpPr>
@@ -5117,6 +5173,10 @@
             <a:prstDash val="solid"/>
           </a:ln>
         </p:spPr>
+        <p:txBody xmlns:a="http://schemas.openxmlformats.org/drawingml/2006/main">
+          <a:bodyPr/>
+          <a:p/>
+        </p:txBody>
       </p:sp>
       <p:sp>
         <p:nvSpPr>
@@ -5268,6 +5328,10 @@
             <a:prstDash val="solid"/>
           </a:ln>
         </p:spPr>
+        <p:txBody xmlns:a="http://schemas.openxmlformats.org/drawingml/2006/main">
+          <a:bodyPr/>
+          <a:p/>
+        </p:txBody>
       </p:sp>
       <p:sp>
         <p:nvSpPr>
@@ -5419,6 +5483,10 @@
             <a:prstDash val="solid"/>
           </a:ln>
         </p:spPr>
+        <p:txBody xmlns:a="http://schemas.openxmlformats.org/drawingml/2006/main">
+          <a:bodyPr/>
+          <a:p/>
+        </p:txBody>
       </p:sp>
       <p:sp>
         <p:nvSpPr>
@@ -6034,6 +6102,10 @@
             <a:prstDash val="solid"/>
           </a:ln>
         </p:spPr>
+        <p:txBody xmlns:a="http://schemas.openxmlformats.org/drawingml/2006/main">
+          <a:bodyPr/>
+          <a:p/>
+        </p:txBody>
       </p:sp>
       <p:sp>
         <p:nvSpPr>
@@ -6447,6 +6519,10 @@
             <a:prstDash val="solid"/>
           </a:ln>
         </p:spPr>
+        <p:txBody xmlns:a="http://schemas.openxmlformats.org/drawingml/2006/main">
+          <a:bodyPr/>
+          <a:p/>
+        </p:txBody>
       </p:sp>
       <p:sp>
         <p:nvSpPr>
@@ -6539,6 +6615,10 @@
             <a:prstDash val="solid"/>
           </a:ln>
         </p:spPr>
+        <p:txBody xmlns:a="http://schemas.openxmlformats.org/drawingml/2006/main">
+          <a:bodyPr/>
+          <a:p/>
+        </p:txBody>
       </p:sp>
       <p:sp>
         <p:nvSpPr>
@@ -6749,6 +6829,10 @@
             <a:prstDash val="solid"/>
           </a:ln>
         </p:spPr>
+        <p:txBody xmlns:a="http://schemas.openxmlformats.org/drawingml/2006/main">
+          <a:bodyPr/>
+          <a:p/>
+        </p:txBody>
       </p:sp>
       <p:sp>
         <p:nvSpPr>
@@ -7305,6 +7389,10 @@
             <a:prstDash val="solid"/>
           </a:ln>
         </p:spPr>
+        <p:txBody xmlns:a="http://schemas.openxmlformats.org/drawingml/2006/main">
+          <a:bodyPr/>
+          <a:p/>
+        </p:txBody>
       </p:sp>
       <p:sp>
         <p:nvSpPr>
@@ -7515,6 +7603,10 @@
             <a:prstDash val="solid"/>
           </a:ln>
         </p:spPr>
+        <p:txBody xmlns:a="http://schemas.openxmlformats.org/drawingml/2006/main">
+          <a:bodyPr/>
+          <a:p/>
+        </p:txBody>
       </p:sp>
       <p:sp>
         <p:nvSpPr>
@@ -7725,6 +7817,10 @@
             <a:prstDash val="solid"/>
           </a:ln>
         </p:spPr>
+        <p:txBody xmlns:a="http://schemas.openxmlformats.org/drawingml/2006/main">
+          <a:bodyPr/>
+          <a:p/>
+        </p:txBody>
       </p:sp>
       <p:sp>
         <p:nvSpPr>
@@ -8016,6 +8112,10 @@
             <a:prstDash val="solid"/>
           </a:ln>
         </p:spPr>
+        <p:txBody xmlns:a="http://schemas.openxmlformats.org/drawingml/2006/main">
+          <a:bodyPr/>
+          <a:p/>
+        </p:txBody>
       </p:sp>
       <p:sp>
         <p:nvSpPr>
@@ -8189,6 +8289,10 @@
             <a:prstDash val="solid"/>
           </a:ln>
         </p:spPr>
+        <p:txBody xmlns:a="http://schemas.openxmlformats.org/drawingml/2006/main">
+          <a:bodyPr/>
+          <a:p/>
+        </p:txBody>
       </p:sp>
       <p:sp>
         <p:nvSpPr>
@@ -8386,6 +8490,10 @@
             <a:prstDash val="solid"/>
           </a:ln>
         </p:spPr>
+        <p:txBody xmlns:a="http://schemas.openxmlformats.org/drawingml/2006/main">
+          <a:bodyPr/>
+          <a:p/>
+        </p:txBody>
       </p:sp>
       <p:sp>
         <p:nvSpPr>
@@ -8583,6 +8691,10 @@
             <a:prstDash val="solid"/>
           </a:ln>
         </p:spPr>
+        <p:txBody xmlns:a="http://schemas.openxmlformats.org/drawingml/2006/main">
+          <a:bodyPr/>
+          <a:p/>
+        </p:txBody>
       </p:sp>
       <p:sp>
         <p:nvSpPr>
@@ -8734,6 +8846,10 @@
             <a:prstDash val="solid"/>
           </a:ln>
         </p:spPr>
+        <p:txBody xmlns:a="http://schemas.openxmlformats.org/drawingml/2006/main">
+          <a:bodyPr/>
+          <a:p/>
+        </p:txBody>
       </p:sp>
       <p:sp>
         <p:nvSpPr>
@@ -8909,6 +9025,10 @@
             <a:prstDash val="solid"/>
           </a:ln>
         </p:spPr>
+        <p:txBody xmlns:a="http://schemas.openxmlformats.org/drawingml/2006/main">
+          <a:bodyPr/>
+          <a:p/>
+        </p:txBody>
       </p:sp>
       <p:sp>
         <p:nvSpPr>
@@ -9369,6 +9489,10 @@
             <a:prstDash val="solid"/>
           </a:ln>
         </p:spPr>
+        <p:txBody xmlns:a="http://schemas.openxmlformats.org/drawingml/2006/main">
+          <a:bodyPr/>
+          <a:p/>
+        </p:txBody>
       </p:sp>
       <p:sp>
         <p:nvSpPr>
@@ -9601,6 +9725,10 @@
             <a:prstDash val="solid"/>
           </a:ln>
         </p:spPr>
+        <p:txBody xmlns:a="http://schemas.openxmlformats.org/drawingml/2006/main">
+          <a:bodyPr/>
+          <a:p/>
+        </p:txBody>
       </p:sp>
       <p:sp>
         <p:nvSpPr>
@@ -9833,6 +9961,10 @@
             <a:prstDash val="solid"/>
           </a:ln>
         </p:spPr>
+        <p:txBody xmlns:a="http://schemas.openxmlformats.org/drawingml/2006/main">
+          <a:bodyPr/>
+          <a:p/>
+        </p:txBody>
       </p:sp>
       <p:sp>
         <p:nvSpPr>
@@ -10043,6 +10175,10 @@
             <a:prstDash val="solid"/>
           </a:ln>
         </p:spPr>
+        <p:txBody xmlns:a="http://schemas.openxmlformats.org/drawingml/2006/main">
+          <a:bodyPr/>
+          <a:p/>
+        </p:txBody>
       </p:sp>
       <p:sp>
         <p:nvSpPr>
@@ -10253,6 +10389,10 @@
             <a:prstDash val="solid"/>
           </a:ln>
         </p:spPr>
+        <p:txBody xmlns:a="http://schemas.openxmlformats.org/drawingml/2006/main">
+          <a:bodyPr/>
+          <a:p/>
+        </p:txBody>
       </p:sp>
       <p:sp>
         <p:nvSpPr>
@@ -10632,6 +10772,10 @@
             <a:prstDash val="solid"/>
           </a:ln>
         </p:spPr>
+        <p:txBody xmlns:a="http://schemas.openxmlformats.org/drawingml/2006/main">
+          <a:bodyPr/>
+          <a:p/>
+        </p:txBody>
       </p:sp>
       <p:sp>
         <p:nvSpPr>
@@ -10807,6 +10951,10 @@
             <a:prstDash val="solid"/>
           </a:ln>
         </p:spPr>
+        <p:txBody xmlns:a="http://schemas.openxmlformats.org/drawingml/2006/main">
+          <a:bodyPr/>
+          <a:p/>
+        </p:txBody>
       </p:sp>
       <p:sp>
         <p:nvSpPr>
@@ -10982,6 +11130,10 @@
             <a:prstDash val="solid"/>
           </a:ln>
         </p:spPr>
+        <p:txBody xmlns:a="http://schemas.openxmlformats.org/drawingml/2006/main">
+          <a:bodyPr/>
+          <a:p/>
+        </p:txBody>
       </p:sp>
       <p:sp>
         <p:nvSpPr>
@@ -11629,6 +11781,10 @@
             <a:prstDash val="solid"/>
           </a:ln>
         </p:spPr>
+        <p:txBody xmlns:a="http://schemas.openxmlformats.org/drawingml/2006/main">
+          <a:bodyPr/>
+          <a:p/>
+        </p:txBody>
       </p:sp>
       <p:sp>
         <p:nvSpPr>
@@ -12024,6 +12180,10 @@
             <a:prstDash val="solid"/>
           </a:ln>
         </p:spPr>
+        <p:txBody xmlns:a="http://schemas.openxmlformats.org/drawingml/2006/main">
+          <a:bodyPr/>
+          <a:p/>
+        </p:txBody>
       </p:sp>
       <p:sp>
         <p:nvSpPr>
@@ -12177,6 +12337,10 @@
             <a:prstDash val="solid"/>
           </a:ln>
         </p:spPr>
+        <p:txBody xmlns:a="http://schemas.openxmlformats.org/drawingml/2006/main">
+          <a:bodyPr/>
+          <a:p/>
+        </p:txBody>
       </p:sp>
       <p:sp>
         <p:nvSpPr>
@@ -12330,6 +12494,10 @@
             <a:prstDash val="solid"/>
           </a:ln>
         </p:spPr>
+        <p:txBody xmlns:a="http://schemas.openxmlformats.org/drawingml/2006/main">
+          <a:bodyPr/>
+          <a:p/>
+        </p:txBody>
       </p:sp>
       <p:sp>
         <p:nvSpPr>
@@ -12725,6 +12893,10 @@
             <a:prstDash val="solid"/>
           </a:ln>
         </p:spPr>
+        <p:txBody xmlns:a="http://schemas.openxmlformats.org/drawingml/2006/main">
+          <a:bodyPr/>
+          <a:p/>
+        </p:txBody>
       </p:sp>
       <p:sp>
         <p:nvSpPr>
@@ -12817,6 +12989,10 @@
             <a:prstDash val="solid"/>
           </a:ln>
         </p:spPr>
+        <p:txBody xmlns:a="http://schemas.openxmlformats.org/drawingml/2006/main">
+          <a:bodyPr/>
+          <a:p/>
+        </p:txBody>
       </p:sp>
       <p:sp>
         <p:nvSpPr>
@@ -13255,6 +13431,10 @@
             <a:prstDash val="solid"/>
           </a:ln>
         </p:spPr>
+        <p:txBody xmlns:a="http://schemas.openxmlformats.org/drawingml/2006/main">
+          <a:bodyPr/>
+          <a:p/>
+        </p:txBody>
       </p:sp>
       <p:pic>
         <p:nvPicPr>
@@ -13310,6 +13490,10 @@
             <a:prstDash val="solid"/>
           </a:ln>
         </p:spPr>
+        <p:txBody xmlns:a="http://schemas.openxmlformats.org/drawingml/2006/main">
+          <a:bodyPr/>
+          <a:p/>
+        </p:txBody>
       </p:sp>
       <p:sp>
         <p:nvSpPr>
@@ -13461,6 +13645,10 @@
             <a:prstDash val="solid"/>
           </a:ln>
         </p:spPr>
+        <p:txBody xmlns:a="http://schemas.openxmlformats.org/drawingml/2006/main">
+          <a:bodyPr/>
+          <a:p/>
+        </p:txBody>
       </p:sp>
       <p:sp>
         <p:nvSpPr>
@@ -13722,7 +13910,7 @@
                 <a:ea typeface="Arial"/>
                 <a:cs typeface="Arial"/>
               </a:rPr>
-              <a:t>Veća populacija sve manje povećava vrednost funkcije cilja</a:t>
+              <a:t>Vreme izvršavanja raste mnogo brže od kvaliteta rešenja</a:t>
             </a:r>
           </a:p>
         </p:txBody>
@@ -13996,7 +14184,7 @@
                 <a:ea typeface="Arial"/>
                 <a:cs typeface="Arial"/>
               </a:rPr>
-              <a:t>Kvalitet (% optimuma)</a:t>
+              <a:t>Prosečan kvalitet (% optimuma)</a:t>
             </a:r>
           </a:p>
         </p:txBody>
@@ -14071,7 +14259,7 @@
                 <a:ea typeface="Arial"/>
                 <a:cs typeface="Arial"/>
               </a:rPr>
-              <a:t>Prosečno vreme jednog pokretanja</a:t>
+              <a:t>Prosečno vreme jednog pokretanja (s)</a:t>
             </a:r>
           </a:p>
         </p:txBody>
@@ -14108,6 +14296,10 @@
             <a:prstDash val="solid"/>
           </a:ln>
         </p:spPr>
+        <p:txBody xmlns:a="http://schemas.openxmlformats.org/drawingml/2006/main">
+          <a:bodyPr/>
+          <a:p/>
+        </p:txBody>
       </p:sp>
       <p:sp>
         <p:nvSpPr>
@@ -14163,7 +14355,7 @@
                 <a:ea typeface="Arial"/>
                 <a:cs typeface="Arial"/>
               </a:rPr>
-              <a:t>100k → 200k: funkcija cilja +≈0,15%, vreme izvršavanja ≈3,5× duže</a:t>
+              <a:t>10 M → 40 M evaluacija: kvalitet +0,15% (98,68 → 98,83), vreme 504 s → 1.779 s (3,5×)</a:t>
             </a:r>
           </a:p>
         </p:txBody>
